--- a/05-surveys/pics/reprasentative-umfragen.pptx
+++ b/05-surveys/pics/reprasentative-umfragen.pptx
@@ -104,6 +104,11 @@
       </a:defRPr>
     </a:lvl9pPr>
   </p:defaultTextStyle>
+  <p:extLst>
+    <p:ext uri="{EFAFB233-063F-42B5-8137-9DF3F51BA10A}">
+      <p15:sldGuideLst xmlns:p15="http://schemas.microsoft.com/office/powerpoint/2012/main"/>
+    </p:ext>
+  </p:extLst>
 </p:presentation>
 </file>
 
@@ -256,7 +261,7 @@
           <a:p>
             <a:fld id="{403A2DA4-2C10-324A-847B-42DAE7790113}" type="datetimeFigureOut">
               <a:rPr lang="en-DE" smtClean="0"/>
-              <a:t>28.02.26</a:t>
+              <a:t>08.03.26</a:t>
             </a:fld>
             <a:endParaRPr lang="en-DE"/>
           </a:p>
@@ -456,7 +461,7 @@
           <a:p>
             <a:fld id="{403A2DA4-2C10-324A-847B-42DAE7790113}" type="datetimeFigureOut">
               <a:rPr lang="en-DE" smtClean="0"/>
-              <a:t>28.02.26</a:t>
+              <a:t>08.03.26</a:t>
             </a:fld>
             <a:endParaRPr lang="en-DE"/>
           </a:p>
@@ -666,7 +671,7 @@
           <a:p>
             <a:fld id="{403A2DA4-2C10-324A-847B-42DAE7790113}" type="datetimeFigureOut">
               <a:rPr lang="en-DE" smtClean="0"/>
-              <a:t>28.02.26</a:t>
+              <a:t>08.03.26</a:t>
             </a:fld>
             <a:endParaRPr lang="en-DE"/>
           </a:p>
@@ -866,7 +871,7 @@
           <a:p>
             <a:fld id="{403A2DA4-2C10-324A-847B-42DAE7790113}" type="datetimeFigureOut">
               <a:rPr lang="en-DE" smtClean="0"/>
-              <a:t>28.02.26</a:t>
+              <a:t>08.03.26</a:t>
             </a:fld>
             <a:endParaRPr lang="en-DE"/>
           </a:p>
@@ -1142,7 +1147,7 @@
           <a:p>
             <a:fld id="{403A2DA4-2C10-324A-847B-42DAE7790113}" type="datetimeFigureOut">
               <a:rPr lang="en-DE" smtClean="0"/>
-              <a:t>28.02.26</a:t>
+              <a:t>08.03.26</a:t>
             </a:fld>
             <a:endParaRPr lang="en-DE"/>
           </a:p>
@@ -1410,7 +1415,7 @@
           <a:p>
             <a:fld id="{403A2DA4-2C10-324A-847B-42DAE7790113}" type="datetimeFigureOut">
               <a:rPr lang="en-DE" smtClean="0"/>
-              <a:t>28.02.26</a:t>
+              <a:t>08.03.26</a:t>
             </a:fld>
             <a:endParaRPr lang="en-DE"/>
           </a:p>
@@ -1825,7 +1830,7 @@
           <a:p>
             <a:fld id="{403A2DA4-2C10-324A-847B-42DAE7790113}" type="datetimeFigureOut">
               <a:rPr lang="en-DE" smtClean="0"/>
-              <a:t>28.02.26</a:t>
+              <a:t>08.03.26</a:t>
             </a:fld>
             <a:endParaRPr lang="en-DE"/>
           </a:p>
@@ -1967,7 +1972,7 @@
           <a:p>
             <a:fld id="{403A2DA4-2C10-324A-847B-42DAE7790113}" type="datetimeFigureOut">
               <a:rPr lang="en-DE" smtClean="0"/>
-              <a:t>28.02.26</a:t>
+              <a:t>08.03.26</a:t>
             </a:fld>
             <a:endParaRPr lang="en-DE"/>
           </a:p>
@@ -2080,7 +2085,7 @@
           <a:p>
             <a:fld id="{403A2DA4-2C10-324A-847B-42DAE7790113}" type="datetimeFigureOut">
               <a:rPr lang="en-DE" smtClean="0"/>
-              <a:t>28.02.26</a:t>
+              <a:t>08.03.26</a:t>
             </a:fld>
             <a:endParaRPr lang="en-DE"/>
           </a:p>
@@ -2393,7 +2398,7 @@
           <a:p>
             <a:fld id="{403A2DA4-2C10-324A-847B-42DAE7790113}" type="datetimeFigureOut">
               <a:rPr lang="en-DE" smtClean="0"/>
-              <a:t>28.02.26</a:t>
+              <a:t>08.03.26</a:t>
             </a:fld>
             <a:endParaRPr lang="en-DE"/>
           </a:p>
@@ -2682,7 +2687,7 @@
           <a:p>
             <a:fld id="{403A2DA4-2C10-324A-847B-42DAE7790113}" type="datetimeFigureOut">
               <a:rPr lang="en-DE" smtClean="0"/>
-              <a:t>28.02.26</a:t>
+              <a:t>08.03.26</a:t>
             </a:fld>
             <a:endParaRPr lang="en-DE"/>
           </a:p>
@@ -2925,7 +2930,7 @@
           <a:p>
             <a:fld id="{403A2DA4-2C10-324A-847B-42DAE7790113}" type="datetimeFigureOut">
               <a:rPr lang="en-DE" smtClean="0"/>
-              <a:t>28.02.26</a:t>
+              <a:t>08.03.26</a:t>
             </a:fld>
             <a:endParaRPr lang="en-DE"/>
           </a:p>
@@ -3522,6 +3527,330 @@
           </a:prstGeom>
         </p:spPr>
       </p:pic>
+      <p:sp>
+        <p:nvSpPr>
+          <p:cNvPr id="2" name="Rectangle 1">
+            <a:extLst>
+              <a:ext uri="{FF2B5EF4-FFF2-40B4-BE49-F238E27FC236}">
+                <a16:creationId xmlns:a16="http://schemas.microsoft.com/office/drawing/2014/main" id="{4667E0E0-C8A7-5C60-07C9-AA965D1BF224}"/>
+              </a:ext>
+            </a:extLst>
+          </p:cNvPr>
+          <p:cNvSpPr/>
+          <p:nvPr/>
+        </p:nvSpPr>
+        <p:spPr>
+          <a:xfrm>
+            <a:off x="241300" y="1514475"/>
+            <a:ext cx="1606550" cy="219075"/>
+          </a:xfrm>
+          <a:prstGeom prst="rect">
+            <a:avLst/>
+          </a:prstGeom>
+          <a:solidFill>
+            <a:srgbClr val="FF0000">
+              <a:alpha val="53725"/>
+            </a:srgbClr>
+          </a:solidFill>
+          <a:ln>
+            <a:noFill/>
+          </a:ln>
+        </p:spPr>
+        <p:style>
+          <a:lnRef idx="2">
+            <a:schemeClr val="accent1">
+              <a:shade val="15000"/>
+            </a:schemeClr>
+          </a:lnRef>
+          <a:fillRef idx="1">
+            <a:schemeClr val="accent1"/>
+          </a:fillRef>
+          <a:effectRef idx="0">
+            <a:schemeClr val="accent1"/>
+          </a:effectRef>
+          <a:fontRef idx="minor">
+            <a:schemeClr val="lt1"/>
+          </a:fontRef>
+        </p:style>
+        <p:txBody>
+          <a:bodyPr rtlCol="0" anchor="ctr"/>
+          <a:lstStyle/>
+          <a:p>
+            <a:pPr algn="ctr"/>
+            <a:endParaRPr lang="en-DE"/>
+          </a:p>
+        </p:txBody>
+      </p:sp>
+      <p:sp>
+        <p:nvSpPr>
+          <p:cNvPr id="3" name="Rectangle 2">
+            <a:extLst>
+              <a:ext uri="{FF2B5EF4-FFF2-40B4-BE49-F238E27FC236}">
+                <a16:creationId xmlns:a16="http://schemas.microsoft.com/office/drawing/2014/main" id="{E067FB05-C125-FD75-BF40-5FF70A99FD6C}"/>
+              </a:ext>
+            </a:extLst>
+          </p:cNvPr>
+          <p:cNvSpPr/>
+          <p:nvPr/>
+        </p:nvSpPr>
+        <p:spPr>
+          <a:xfrm>
+            <a:off x="904339" y="3953182"/>
+            <a:ext cx="2362197" cy="212418"/>
+          </a:xfrm>
+          <a:prstGeom prst="rect">
+            <a:avLst/>
+          </a:prstGeom>
+          <a:solidFill>
+            <a:srgbClr val="FF0000">
+              <a:alpha val="53725"/>
+            </a:srgbClr>
+          </a:solidFill>
+          <a:ln>
+            <a:noFill/>
+          </a:ln>
+        </p:spPr>
+        <p:style>
+          <a:lnRef idx="2">
+            <a:schemeClr val="accent1">
+              <a:shade val="15000"/>
+            </a:schemeClr>
+          </a:lnRef>
+          <a:fillRef idx="1">
+            <a:schemeClr val="accent1"/>
+          </a:fillRef>
+          <a:effectRef idx="0">
+            <a:schemeClr val="accent1"/>
+          </a:effectRef>
+          <a:fontRef idx="minor">
+            <a:schemeClr val="lt1"/>
+          </a:fontRef>
+        </p:style>
+        <p:txBody>
+          <a:bodyPr rtlCol="0" anchor="ctr"/>
+          <a:lstStyle/>
+          <a:p>
+            <a:pPr algn="ctr"/>
+            <a:endParaRPr lang="en-DE"/>
+          </a:p>
+        </p:txBody>
+      </p:sp>
+      <p:sp>
+        <p:nvSpPr>
+          <p:cNvPr id="4" name="Rectangle 3">
+            <a:extLst>
+              <a:ext uri="{FF2B5EF4-FFF2-40B4-BE49-F238E27FC236}">
+                <a16:creationId xmlns:a16="http://schemas.microsoft.com/office/drawing/2014/main" id="{D99294E0-8D54-3471-ABB7-EA50F333AC67}"/>
+              </a:ext>
+            </a:extLst>
+          </p:cNvPr>
+          <p:cNvSpPr/>
+          <p:nvPr/>
+        </p:nvSpPr>
+        <p:spPr>
+          <a:xfrm>
+            <a:off x="1742536" y="5480648"/>
+            <a:ext cx="1570007" cy="103517"/>
+          </a:xfrm>
+          <a:prstGeom prst="rect">
+            <a:avLst/>
+          </a:prstGeom>
+          <a:solidFill>
+            <a:srgbClr val="FF0000">
+              <a:alpha val="53725"/>
+            </a:srgbClr>
+          </a:solidFill>
+          <a:ln>
+            <a:noFill/>
+          </a:ln>
+        </p:spPr>
+        <p:style>
+          <a:lnRef idx="2">
+            <a:schemeClr val="accent1">
+              <a:shade val="15000"/>
+            </a:schemeClr>
+          </a:lnRef>
+          <a:fillRef idx="1">
+            <a:schemeClr val="accent1"/>
+          </a:fillRef>
+          <a:effectRef idx="0">
+            <a:schemeClr val="accent1"/>
+          </a:effectRef>
+          <a:fontRef idx="minor">
+            <a:schemeClr val="lt1"/>
+          </a:fontRef>
+        </p:style>
+        <p:txBody>
+          <a:bodyPr rtlCol="0" anchor="ctr"/>
+          <a:lstStyle/>
+          <a:p>
+            <a:pPr algn="ctr"/>
+            <a:endParaRPr lang="en-DE"/>
+          </a:p>
+        </p:txBody>
+      </p:sp>
+      <p:sp>
+        <p:nvSpPr>
+          <p:cNvPr id="6" name="Rectangle 5">
+            <a:extLst>
+              <a:ext uri="{FF2B5EF4-FFF2-40B4-BE49-F238E27FC236}">
+                <a16:creationId xmlns:a16="http://schemas.microsoft.com/office/drawing/2014/main" id="{D7DBEB9F-8855-C55D-B36C-19281AD8A145}"/>
+              </a:ext>
+            </a:extLst>
+          </p:cNvPr>
+          <p:cNvSpPr/>
+          <p:nvPr/>
+        </p:nvSpPr>
+        <p:spPr>
+          <a:xfrm>
+            <a:off x="6090249" y="346522"/>
+            <a:ext cx="1247955" cy="113553"/>
+          </a:xfrm>
+          <a:prstGeom prst="rect">
+            <a:avLst/>
+          </a:prstGeom>
+          <a:solidFill>
+            <a:srgbClr val="FF0000">
+              <a:alpha val="53725"/>
+            </a:srgbClr>
+          </a:solidFill>
+          <a:ln>
+            <a:noFill/>
+          </a:ln>
+        </p:spPr>
+        <p:style>
+          <a:lnRef idx="2">
+            <a:schemeClr val="accent1">
+              <a:shade val="15000"/>
+            </a:schemeClr>
+          </a:lnRef>
+          <a:fillRef idx="1">
+            <a:schemeClr val="accent1"/>
+          </a:fillRef>
+          <a:effectRef idx="0">
+            <a:schemeClr val="accent1"/>
+          </a:effectRef>
+          <a:fontRef idx="minor">
+            <a:schemeClr val="lt1"/>
+          </a:fontRef>
+        </p:style>
+        <p:txBody>
+          <a:bodyPr rtlCol="0" anchor="ctr"/>
+          <a:lstStyle/>
+          <a:p>
+            <a:pPr algn="ctr"/>
+            <a:endParaRPr lang="en-DE"/>
+          </a:p>
+        </p:txBody>
+      </p:sp>
+      <p:sp>
+        <p:nvSpPr>
+          <p:cNvPr id="8" name="Rectangle 7">
+            <a:extLst>
+              <a:ext uri="{FF2B5EF4-FFF2-40B4-BE49-F238E27FC236}">
+                <a16:creationId xmlns:a16="http://schemas.microsoft.com/office/drawing/2014/main" id="{DB7CBA8E-F08F-AFC2-EB96-736C08681BB8}"/>
+              </a:ext>
+            </a:extLst>
+          </p:cNvPr>
+          <p:cNvSpPr/>
+          <p:nvPr/>
+        </p:nvSpPr>
+        <p:spPr>
+          <a:xfrm>
+            <a:off x="9903240" y="1291924"/>
+            <a:ext cx="1483628" cy="105556"/>
+          </a:xfrm>
+          <a:prstGeom prst="rect">
+            <a:avLst/>
+          </a:prstGeom>
+          <a:solidFill>
+            <a:srgbClr val="FF0000">
+              <a:alpha val="53725"/>
+            </a:srgbClr>
+          </a:solidFill>
+          <a:ln>
+            <a:noFill/>
+          </a:ln>
+        </p:spPr>
+        <p:style>
+          <a:lnRef idx="2">
+            <a:schemeClr val="accent1">
+              <a:shade val="15000"/>
+            </a:schemeClr>
+          </a:lnRef>
+          <a:fillRef idx="1">
+            <a:schemeClr val="accent1"/>
+          </a:fillRef>
+          <a:effectRef idx="0">
+            <a:schemeClr val="accent1"/>
+          </a:effectRef>
+          <a:fontRef idx="minor">
+            <a:schemeClr val="lt1"/>
+          </a:fontRef>
+        </p:style>
+        <p:txBody>
+          <a:bodyPr rtlCol="0" anchor="ctr"/>
+          <a:lstStyle/>
+          <a:p>
+            <a:pPr algn="ctr"/>
+            <a:endParaRPr lang="en-DE"/>
+          </a:p>
+        </p:txBody>
+      </p:sp>
+      <p:sp>
+        <p:nvSpPr>
+          <p:cNvPr id="10" name="Rectangle 9">
+            <a:extLst>
+              <a:ext uri="{FF2B5EF4-FFF2-40B4-BE49-F238E27FC236}">
+                <a16:creationId xmlns:a16="http://schemas.microsoft.com/office/drawing/2014/main" id="{7C1362BB-B581-7A09-702C-FA7F0EA2AD11}"/>
+              </a:ext>
+            </a:extLst>
+          </p:cNvPr>
+          <p:cNvSpPr/>
+          <p:nvPr/>
+        </p:nvSpPr>
+        <p:spPr>
+          <a:xfrm>
+            <a:off x="9054975" y="6148503"/>
+            <a:ext cx="1181704" cy="114274"/>
+          </a:xfrm>
+          <a:prstGeom prst="rect">
+            <a:avLst/>
+          </a:prstGeom>
+          <a:solidFill>
+            <a:srgbClr val="FF0000">
+              <a:alpha val="53725"/>
+            </a:srgbClr>
+          </a:solidFill>
+          <a:ln>
+            <a:noFill/>
+          </a:ln>
+        </p:spPr>
+        <p:style>
+          <a:lnRef idx="2">
+            <a:schemeClr val="accent1">
+              <a:shade val="15000"/>
+            </a:schemeClr>
+          </a:lnRef>
+          <a:fillRef idx="1">
+            <a:schemeClr val="accent1"/>
+          </a:fillRef>
+          <a:effectRef idx="0">
+            <a:schemeClr val="accent1"/>
+          </a:effectRef>
+          <a:fontRef idx="minor">
+            <a:schemeClr val="lt1"/>
+          </a:fontRef>
+        </p:style>
+        <p:txBody>
+          <a:bodyPr rtlCol="0" anchor="ctr"/>
+          <a:lstStyle/>
+          <a:p>
+            <a:pPr algn="ctr"/>
+            <a:endParaRPr lang="en-DE"/>
+          </a:p>
+        </p:txBody>
+      </p:sp>
     </p:spTree>
     <p:extLst>
       <p:ext uri="{BB962C8B-B14F-4D97-AF65-F5344CB8AC3E}">
